--- a/main_swapmoe/patents/ppt/MoE解码专家驻留与自主补载.pptx
+++ b/main_swapmoe/patents/ppt/MoE解码专家驻留与自主补载.pptx
@@ -1693,6 +1693,11 @@
             <a:pPr/>
             <a:r>
               <a:t>具体实施例：四节点同层专家池128，Top-8。此页仅展示节点A与一个请求组。P→D已有KV交接，本方案增加亲和性摘要、匹配和专家准备成本。首个decode步无历史选择时按真实gate执行。来源：https://docs.nvidia.com/dynamo/dev/knowledge-base/concepts/system-architecture/disaggregated-serving</a:t>
+            </a:r>
+          </a:p>
+          <a:p>
+            <a:r>
+              <a:t>专家激活原图来源：用户提供的 phd-intro.pptx 第13页。Oracle-MoE既有训练的专家激活轨迹，用于说明连续性，不作为128专家Top-8覆盖率的直接测量依据。</a:t>
             </a:r>
           </a:p>
         </p:txBody>
@@ -4272,25 +4277,131 @@
         </p:spPr>
         <p:txBody>
           <a:bodyPr lIns="0" tIns="0" rIns="0" bIns="0">
-            <a:spAutoFit/>
+            <a:noAutofit/>
           </a:bodyPr>
           <a:lstStyle>
+            <a:defPPr algn="l">
+              <a:defRPr sz="1800" b="1">
+                <a:solidFill>
+                  <a:srgbClr val="333333"/>
+                </a:solidFill>
+                <a:latin typeface="Hiragino Sans GB"/>
+                <a:ea typeface="Hiragino Sans GB"/>
+                <a:cs typeface="Hiragino Sans GB"/>
+              </a:defRPr>
+            </a:defPPr>
             <a:lvl1pPr algn="l">
-              <a:defRPr>
-                <a:solidFill>
-                  <a:srgbClr val="333333"/>
-                </a:solidFill>
-                <a:latin typeface="冬青黑体简体中文 W6"/>
-                <a:ea typeface="冬青黑体简体中文 W6"/>
-                <a:cs typeface="冬青黑体简体中文 W6"/>
-                <a:sym typeface="冬青黑体简体中文 W6"/>
+              <a:defRPr sz="1800" b="1">
+                <a:solidFill>
+                  <a:srgbClr val="333333"/>
+                </a:solidFill>
+                <a:latin typeface="Hiragino Sans GB"/>
+                <a:ea typeface="Hiragino Sans GB"/>
+                <a:cs typeface="Hiragino Sans GB"/>
               </a:defRPr>
             </a:lvl1pPr>
+            <a:lvl2pPr algn="l">
+              <a:defRPr sz="1800" b="1">
+                <a:solidFill>
+                  <a:srgbClr val="333333"/>
+                </a:solidFill>
+                <a:latin typeface="Hiragino Sans GB"/>
+                <a:ea typeface="Hiragino Sans GB"/>
+                <a:cs typeface="Hiragino Sans GB"/>
+              </a:defRPr>
+            </a:lvl2pPr>
+            <a:lvl3pPr algn="l">
+              <a:defRPr sz="1800" b="1">
+                <a:solidFill>
+                  <a:srgbClr val="333333"/>
+                </a:solidFill>
+                <a:latin typeface="Hiragino Sans GB"/>
+                <a:ea typeface="Hiragino Sans GB"/>
+                <a:cs typeface="Hiragino Sans GB"/>
+              </a:defRPr>
+            </a:lvl3pPr>
+            <a:lvl4pPr algn="l">
+              <a:defRPr sz="1800" b="1">
+                <a:solidFill>
+                  <a:srgbClr val="333333"/>
+                </a:solidFill>
+                <a:latin typeface="Hiragino Sans GB"/>
+                <a:ea typeface="Hiragino Sans GB"/>
+                <a:cs typeface="Hiragino Sans GB"/>
+              </a:defRPr>
+            </a:lvl4pPr>
+            <a:lvl5pPr algn="l">
+              <a:defRPr sz="1800" b="1">
+                <a:solidFill>
+                  <a:srgbClr val="333333"/>
+                </a:solidFill>
+                <a:latin typeface="Hiragino Sans GB"/>
+                <a:ea typeface="Hiragino Sans GB"/>
+                <a:cs typeface="Hiragino Sans GB"/>
+              </a:defRPr>
+            </a:lvl5pPr>
+            <a:lvl6pPr algn="l">
+              <a:defRPr sz="1800" b="1">
+                <a:solidFill>
+                  <a:srgbClr val="333333"/>
+                </a:solidFill>
+                <a:latin typeface="Hiragino Sans GB"/>
+                <a:ea typeface="Hiragino Sans GB"/>
+                <a:cs typeface="Hiragino Sans GB"/>
+              </a:defRPr>
+            </a:lvl6pPr>
+            <a:lvl7pPr algn="l">
+              <a:defRPr sz="1800" b="1">
+                <a:solidFill>
+                  <a:srgbClr val="333333"/>
+                </a:solidFill>
+                <a:latin typeface="Hiragino Sans GB"/>
+                <a:ea typeface="Hiragino Sans GB"/>
+                <a:cs typeface="Hiragino Sans GB"/>
+              </a:defRPr>
+            </a:lvl7pPr>
+            <a:lvl8pPr algn="l">
+              <a:defRPr sz="1800" b="1">
+                <a:solidFill>
+                  <a:srgbClr val="333333"/>
+                </a:solidFill>
+                <a:latin typeface="Hiragino Sans GB"/>
+                <a:ea typeface="Hiragino Sans GB"/>
+                <a:cs typeface="Hiragino Sans GB"/>
+              </a:defRPr>
+            </a:lvl8pPr>
+            <a:lvl9pPr algn="l">
+              <a:defRPr sz="1800" b="1">
+                <a:solidFill>
+                  <a:srgbClr val="333333"/>
+                </a:solidFill>
+                <a:latin typeface="Hiragino Sans GB"/>
+                <a:ea typeface="Hiragino Sans GB"/>
+                <a:cs typeface="Hiragino Sans GB"/>
+              </a:defRPr>
+            </a:lvl9pPr>
           </a:lstStyle>
           <a:p>
-            <a:pPr algn="l"/>
-            <a:r>
-              <a:t>服务器推理效率</a:t>
+            <a:pPr algn="l">
+              <a:defRPr sz="1800" b="1">
+                <a:solidFill>
+                  <a:srgbClr val="333333"/>
+                </a:solidFill>
+                <a:latin typeface="Hiragino Sans GB"/>
+                <a:ea typeface="Hiragino Sans GB"/>
+                <a:cs typeface="Hiragino Sans GB"/>
+              </a:defRPr>
+            </a:pPr>
+            <a:r>
+              <a:rPr sz="1800" b="1">
+                <a:solidFill>
+                  <a:srgbClr val="333333"/>
+                </a:solidFill>
+                <a:latin typeface="Hiragino Sans GB"/>
+                <a:ea typeface="Hiragino Sans GB"/>
+                <a:cs typeface="Hiragino Sans GB"/>
+              </a:rPr>
+              <a:t>降低推理服务成本</a:t>
             </a:r>
           </a:p>
         </p:txBody>
@@ -4304,7 +4415,7 @@
         <p:spPr>
           <a:xfrm>
             <a:off x="6400800" y="2409825"/>
-            <a:ext cx="5238750" cy="1117600"/>
+            <a:ext cx="5238750" cy="914400"/>
           </a:xfrm>
           <a:prstGeom prst="rect">
             <a:avLst/>
@@ -4320,71 +4431,222 @@
         </p:spPr>
         <p:txBody>
           <a:bodyPr lIns="0" tIns="0" rIns="0" bIns="0">
-            <a:spAutoFit/>
+            <a:noAutofit/>
           </a:bodyPr>
-          <a:lstStyle/>
+          <a:lstStyle>
+            <a:defPPr algn="l">
+              <a:defRPr sz="1500" b="0">
+                <a:solidFill>
+                  <a:srgbClr val="333333"/>
+                </a:solidFill>
+                <a:latin typeface="Hiragino Sans GB"/>
+                <a:ea typeface="Hiragino Sans GB"/>
+                <a:cs typeface="Hiragino Sans GB"/>
+              </a:defRPr>
+            </a:defPPr>
+            <a:lvl1pPr algn="l">
+              <a:defRPr sz="1500" b="0">
+                <a:solidFill>
+                  <a:srgbClr val="333333"/>
+                </a:solidFill>
+                <a:latin typeface="Hiragino Sans GB"/>
+                <a:ea typeface="Hiragino Sans GB"/>
+                <a:cs typeface="Hiragino Sans GB"/>
+              </a:defRPr>
+            </a:lvl1pPr>
+            <a:lvl2pPr algn="l">
+              <a:defRPr sz="1500" b="0">
+                <a:solidFill>
+                  <a:srgbClr val="333333"/>
+                </a:solidFill>
+                <a:latin typeface="Hiragino Sans GB"/>
+                <a:ea typeface="Hiragino Sans GB"/>
+                <a:cs typeface="Hiragino Sans GB"/>
+              </a:defRPr>
+            </a:lvl2pPr>
+            <a:lvl3pPr algn="l">
+              <a:defRPr sz="1500" b="0">
+                <a:solidFill>
+                  <a:srgbClr val="333333"/>
+                </a:solidFill>
+                <a:latin typeface="Hiragino Sans GB"/>
+                <a:ea typeface="Hiragino Sans GB"/>
+                <a:cs typeface="Hiragino Sans GB"/>
+              </a:defRPr>
+            </a:lvl3pPr>
+            <a:lvl4pPr algn="l">
+              <a:defRPr sz="1500" b="0">
+                <a:solidFill>
+                  <a:srgbClr val="333333"/>
+                </a:solidFill>
+                <a:latin typeface="Hiragino Sans GB"/>
+                <a:ea typeface="Hiragino Sans GB"/>
+                <a:cs typeface="Hiragino Sans GB"/>
+              </a:defRPr>
+            </a:lvl4pPr>
+            <a:lvl5pPr algn="l">
+              <a:defRPr sz="1500" b="0">
+                <a:solidFill>
+                  <a:srgbClr val="333333"/>
+                </a:solidFill>
+                <a:latin typeface="Hiragino Sans GB"/>
+                <a:ea typeface="Hiragino Sans GB"/>
+                <a:cs typeface="Hiragino Sans GB"/>
+              </a:defRPr>
+            </a:lvl5pPr>
+            <a:lvl6pPr algn="l">
+              <a:defRPr sz="1500" b="0">
+                <a:solidFill>
+                  <a:srgbClr val="333333"/>
+                </a:solidFill>
+                <a:latin typeface="Hiragino Sans GB"/>
+                <a:ea typeface="Hiragino Sans GB"/>
+                <a:cs typeface="Hiragino Sans GB"/>
+              </a:defRPr>
+            </a:lvl6pPr>
+            <a:lvl7pPr algn="l">
+              <a:defRPr sz="1500" b="0">
+                <a:solidFill>
+                  <a:srgbClr val="333333"/>
+                </a:solidFill>
+                <a:latin typeface="Hiragino Sans GB"/>
+                <a:ea typeface="Hiragino Sans GB"/>
+                <a:cs typeface="Hiragino Sans GB"/>
+              </a:defRPr>
+            </a:lvl7pPr>
+            <a:lvl8pPr algn="l">
+              <a:defRPr sz="1500" b="0">
+                <a:solidFill>
+                  <a:srgbClr val="333333"/>
+                </a:solidFill>
+                <a:latin typeface="Hiragino Sans GB"/>
+                <a:ea typeface="Hiragino Sans GB"/>
+                <a:cs typeface="Hiragino Sans GB"/>
+              </a:defRPr>
+            </a:lvl8pPr>
+            <a:lvl9pPr algn="l">
+              <a:defRPr sz="1500" b="0">
+                <a:solidFill>
+                  <a:srgbClr val="333333"/>
+                </a:solidFill>
+                <a:latin typeface="Hiragino Sans GB"/>
+                <a:ea typeface="Hiragino Sans GB"/>
+                <a:cs typeface="Hiragino Sans GB"/>
+              </a:defRPr>
+            </a:lvl9pPr>
+          </a:lstStyle>
           <a:p>
             <a:pPr algn="l">
-              <a:defRPr sz="1600">
-                <a:solidFill>
-                  <a:srgbClr val="333333"/>
-                </a:solidFill>
-                <a:latin typeface="冬青黑体简体中文 W3"/>
-                <a:ea typeface="冬青黑体简体中文 W3"/>
-                <a:cs typeface="冬青黑体简体中文 W3"/>
-                <a:sym typeface="冬青黑体简体中文 W3"/>
+              <a:defRPr sz="1500" b="0">
+                <a:solidFill>
+                  <a:srgbClr val="333333"/>
+                </a:solidFill>
+                <a:latin typeface="Hiragino Sans GB"/>
+                <a:ea typeface="Hiragino Sans GB"/>
+                <a:cs typeface="Hiragino Sans GB"/>
               </a:defRPr>
             </a:pPr>
             <a:r>
-              <a:t>常用专家驻留后，后续 token 可在节点内完成专家计</a:t>
+              <a:rPr sz="1500" b="0">
+                <a:solidFill>
+                  <a:srgbClr val="333333"/>
+                </a:solidFill>
+                <a:latin typeface="Hiragino Sans GB"/>
+                <a:ea typeface="Hiragino Sans GB"/>
+                <a:cs typeface="Hiragino Sans GB"/>
+              </a:rPr>
+              <a:t>减少跨节点 token 往返，让同一套服务器承载更多</a:t>
             </a:r>
           </a:p>
           <a:p>
             <a:pPr algn="l">
-              <a:defRPr sz="1600">
-                <a:solidFill>
-                  <a:srgbClr val="333333"/>
-                </a:solidFill>
-                <a:latin typeface="冬青黑体简体中文 W3"/>
-                <a:ea typeface="冬青黑体简体中文 W3"/>
-                <a:cs typeface="冬青黑体简体中文 W3"/>
-                <a:sym typeface="冬青黑体简体中文 W3"/>
+              <a:defRPr sz="1500" b="0">
+                <a:solidFill>
+                  <a:srgbClr val="333333"/>
+                </a:solidFill>
+                <a:latin typeface="Hiragino Sans GB"/>
+                <a:ea typeface="Hiragino Sans GB"/>
+                <a:cs typeface="Hiragino Sans GB"/>
               </a:defRPr>
             </a:pPr>
             <a:r>
-              <a:t>算，减少反复的跨节点往返。中心估算中，窗口平均阶</a:t>
+              <a:rPr sz="1500" b="0">
+                <a:solidFill>
+                  <a:srgbClr val="333333"/>
+                </a:solidFill>
+                <a:latin typeface="Hiragino Sans GB"/>
+                <a:ea typeface="Hiragino Sans GB"/>
+                <a:cs typeface="Hiragino Sans GB"/>
+              </a:rPr>
+              <a:t>Decode 请求，</a:t>
+            </a:r>
+            <a:r>
+              <a:rPr sz="1500" b="1">
+                <a:solidFill>
+                  <a:srgbClr val="9C2F32"/>
+                </a:solidFill>
+                <a:latin typeface="Hiragino Sans GB"/>
+                <a:ea typeface="Hiragino Sans GB"/>
+                <a:cs typeface="Hiragino Sans GB"/>
+              </a:rPr>
+              <a:t>降低单位输出 token</a:t>
+            </a:r>
+            <a:r>
+              <a:rPr sz="1500" b="0">
+                <a:solidFill>
+                  <a:srgbClr val="333333"/>
+                </a:solidFill>
+                <a:latin typeface="Hiragino Sans GB"/>
+                <a:ea typeface="Hiragino Sans GB"/>
+                <a:cs typeface="Hiragino Sans GB"/>
+              </a:rPr>
+              <a:t> 的硬件成本。</a:t>
             </a:r>
           </a:p>
           <a:p>
             <a:pPr algn="l">
-              <a:defRPr sz="1600">
-                <a:solidFill>
-                  <a:srgbClr val="333333"/>
-                </a:solidFill>
-                <a:latin typeface="冬青黑体简体中文 W3"/>
-                <a:ea typeface="冬青黑体简体中文 W3"/>
-                <a:cs typeface="冬青黑体简体中文 W3"/>
-                <a:sym typeface="冬青黑体简体中文 W3"/>
+              <a:defRPr sz="1500" b="0">
+                <a:solidFill>
+                  <a:srgbClr val="333333"/>
+                </a:solidFill>
+                <a:latin typeface="Hiragino Sans GB"/>
+                <a:ea typeface="Hiragino Sans GB"/>
+                <a:cs typeface="Hiragino Sans GB"/>
               </a:defRPr>
             </a:pPr>
             <a:r>
-              <a:t>段服务能力提升约 10.2%，体现通信受限场景的部署</a:t>
+              <a:rPr sz="1500" b="0">
+                <a:solidFill>
+                  <a:srgbClr val="333333"/>
+                </a:solidFill>
+                <a:latin typeface="Hiragino Sans GB"/>
+                <a:ea typeface="Hiragino Sans GB"/>
+                <a:cs typeface="Hiragino Sans GB"/>
+              </a:rPr>
+              <a:t>当前模拟预计阶段服务能力提升约 10.5%，实际</a:t>
             </a:r>
           </a:p>
           <a:p>
             <a:pPr algn="l">
-              <a:defRPr sz="1600">
-                <a:solidFill>
-                  <a:srgbClr val="333333"/>
-                </a:solidFill>
-                <a:latin typeface="冬青黑体简体中文 W3"/>
-                <a:ea typeface="冬青黑体简体中文 W3"/>
-                <a:cs typeface="冬青黑体简体中文 W3"/>
-                <a:sym typeface="冬青黑体简体中文 W3"/>
+              <a:defRPr sz="1500" b="0">
+                <a:solidFill>
+                  <a:srgbClr val="333333"/>
+                </a:solidFill>
+                <a:latin typeface="Hiragino Sans GB"/>
+                <a:ea typeface="Hiragino Sans GB"/>
+                <a:cs typeface="Hiragino Sans GB"/>
               </a:defRPr>
             </a:pPr>
             <a:r>
-              <a:t>价值。</a:t>
+              <a:rPr sz="1500" b="0">
+                <a:solidFill>
+                  <a:srgbClr val="333333"/>
+                </a:solidFill>
+                <a:latin typeface="Hiragino Sans GB"/>
+                <a:ea typeface="Hiragino Sans GB"/>
+                <a:cs typeface="Hiragino Sans GB"/>
+              </a:rPr>
+              <a:t>成本降幅取决于该阶段是否构成整机瓶颈。</a:t>
             </a:r>
           </a:p>
         </p:txBody>
@@ -4540,25 +4802,131 @@
         </p:spPr>
         <p:txBody>
           <a:bodyPr lIns="0" tIns="0" rIns="0" bIns="0">
-            <a:spAutoFit/>
+            <a:noAutofit/>
           </a:bodyPr>
           <a:lstStyle>
+            <a:defPPr algn="l">
+              <a:defRPr sz="1800" b="1">
+                <a:solidFill>
+                  <a:srgbClr val="333333"/>
+                </a:solidFill>
+                <a:latin typeface="Hiragino Sans GB"/>
+                <a:ea typeface="Hiragino Sans GB"/>
+                <a:cs typeface="Hiragino Sans GB"/>
+              </a:defRPr>
+            </a:defPPr>
             <a:lvl1pPr algn="l">
-              <a:defRPr>
-                <a:solidFill>
-                  <a:srgbClr val="333333"/>
-                </a:solidFill>
-                <a:latin typeface="冬青黑体简体中文 W6"/>
-                <a:ea typeface="冬青黑体简体中文 W6"/>
-                <a:cs typeface="冬青黑体简体中文 W6"/>
-                <a:sym typeface="冬青黑体简体中文 W6"/>
+              <a:defRPr sz="1800" b="1">
+                <a:solidFill>
+                  <a:srgbClr val="333333"/>
+                </a:solidFill>
+                <a:latin typeface="Hiragino Sans GB"/>
+                <a:ea typeface="Hiragino Sans GB"/>
+                <a:cs typeface="Hiragino Sans GB"/>
               </a:defRPr>
             </a:lvl1pPr>
+            <a:lvl2pPr algn="l">
+              <a:defRPr sz="1800" b="1">
+                <a:solidFill>
+                  <a:srgbClr val="333333"/>
+                </a:solidFill>
+                <a:latin typeface="Hiragino Sans GB"/>
+                <a:ea typeface="Hiragino Sans GB"/>
+                <a:cs typeface="Hiragino Sans GB"/>
+              </a:defRPr>
+            </a:lvl2pPr>
+            <a:lvl3pPr algn="l">
+              <a:defRPr sz="1800" b="1">
+                <a:solidFill>
+                  <a:srgbClr val="333333"/>
+                </a:solidFill>
+                <a:latin typeface="Hiragino Sans GB"/>
+                <a:ea typeface="Hiragino Sans GB"/>
+                <a:cs typeface="Hiragino Sans GB"/>
+              </a:defRPr>
+            </a:lvl3pPr>
+            <a:lvl4pPr algn="l">
+              <a:defRPr sz="1800" b="1">
+                <a:solidFill>
+                  <a:srgbClr val="333333"/>
+                </a:solidFill>
+                <a:latin typeface="Hiragino Sans GB"/>
+                <a:ea typeface="Hiragino Sans GB"/>
+                <a:cs typeface="Hiragino Sans GB"/>
+              </a:defRPr>
+            </a:lvl4pPr>
+            <a:lvl5pPr algn="l">
+              <a:defRPr sz="1800" b="1">
+                <a:solidFill>
+                  <a:srgbClr val="333333"/>
+                </a:solidFill>
+                <a:latin typeface="Hiragino Sans GB"/>
+                <a:ea typeface="Hiragino Sans GB"/>
+                <a:cs typeface="Hiragino Sans GB"/>
+              </a:defRPr>
+            </a:lvl5pPr>
+            <a:lvl6pPr algn="l">
+              <a:defRPr sz="1800" b="1">
+                <a:solidFill>
+                  <a:srgbClr val="333333"/>
+                </a:solidFill>
+                <a:latin typeface="Hiragino Sans GB"/>
+                <a:ea typeface="Hiragino Sans GB"/>
+                <a:cs typeface="Hiragino Sans GB"/>
+              </a:defRPr>
+            </a:lvl6pPr>
+            <a:lvl7pPr algn="l">
+              <a:defRPr sz="1800" b="1">
+                <a:solidFill>
+                  <a:srgbClr val="333333"/>
+                </a:solidFill>
+                <a:latin typeface="Hiragino Sans GB"/>
+                <a:ea typeface="Hiragino Sans GB"/>
+                <a:cs typeface="Hiragino Sans GB"/>
+              </a:defRPr>
+            </a:lvl7pPr>
+            <a:lvl8pPr algn="l">
+              <a:defRPr sz="1800" b="1">
+                <a:solidFill>
+                  <a:srgbClr val="333333"/>
+                </a:solidFill>
+                <a:latin typeface="Hiragino Sans GB"/>
+                <a:ea typeface="Hiragino Sans GB"/>
+                <a:cs typeface="Hiragino Sans GB"/>
+              </a:defRPr>
+            </a:lvl8pPr>
+            <a:lvl9pPr algn="l">
+              <a:defRPr sz="1800" b="1">
+                <a:solidFill>
+                  <a:srgbClr val="333333"/>
+                </a:solidFill>
+                <a:latin typeface="Hiragino Sans GB"/>
+                <a:ea typeface="Hiragino Sans GB"/>
+                <a:cs typeface="Hiragino Sans GB"/>
+              </a:defRPr>
+            </a:lvl9pPr>
           </a:lstStyle>
           <a:p>
-            <a:pPr algn="l"/>
-            <a:r>
-              <a:t>集成范围集中</a:t>
+            <a:pPr algn="l">
+              <a:defRPr sz="1800" b="1">
+                <a:solidFill>
+                  <a:srgbClr val="333333"/>
+                </a:solidFill>
+                <a:latin typeface="Hiragino Sans GB"/>
+                <a:ea typeface="Hiragino Sans GB"/>
+                <a:cs typeface="Hiragino Sans GB"/>
+              </a:defRPr>
+            </a:pPr>
+            <a:r>
+              <a:rPr sz="1800" b="1">
+                <a:solidFill>
+                  <a:srgbClr val="333333"/>
+                </a:solidFill>
+                <a:latin typeface="Hiragino Sans GB"/>
+                <a:ea typeface="Hiragino Sans GB"/>
+                <a:cs typeface="Hiragino Sans GB"/>
+              </a:rPr>
+              <a:t>缓解网络扩容投入</a:t>
             </a:r>
           </a:p>
         </p:txBody>
@@ -4572,7 +4940,7 @@
         <p:spPr>
           <a:xfrm>
             <a:off x="6400800" y="3714750"/>
-            <a:ext cx="5238750" cy="812800"/>
+            <a:ext cx="5238750" cy="914400"/>
           </a:xfrm>
           <a:prstGeom prst="rect">
             <a:avLst/>
@@ -4588,79 +4956,222 @@
         </p:spPr>
         <p:txBody>
           <a:bodyPr lIns="0" tIns="0" rIns="0" bIns="0">
-            <a:spAutoFit/>
+            <a:noAutofit/>
           </a:bodyPr>
-          <a:lstStyle/>
+          <a:lstStyle>
+            <a:defPPr algn="l">
+              <a:defRPr sz="1500" b="0">
+                <a:solidFill>
+                  <a:srgbClr val="333333"/>
+                </a:solidFill>
+                <a:latin typeface="Hiragino Sans GB"/>
+                <a:ea typeface="Hiragino Sans GB"/>
+                <a:cs typeface="Hiragino Sans GB"/>
+              </a:defRPr>
+            </a:defPPr>
+            <a:lvl1pPr algn="l">
+              <a:defRPr sz="1500" b="0">
+                <a:solidFill>
+                  <a:srgbClr val="333333"/>
+                </a:solidFill>
+                <a:latin typeface="Hiragino Sans GB"/>
+                <a:ea typeface="Hiragino Sans GB"/>
+                <a:cs typeface="Hiragino Sans GB"/>
+              </a:defRPr>
+            </a:lvl1pPr>
+            <a:lvl2pPr algn="l">
+              <a:defRPr sz="1500" b="0">
+                <a:solidFill>
+                  <a:srgbClr val="333333"/>
+                </a:solidFill>
+                <a:latin typeface="Hiragino Sans GB"/>
+                <a:ea typeface="Hiragino Sans GB"/>
+                <a:cs typeface="Hiragino Sans GB"/>
+              </a:defRPr>
+            </a:lvl2pPr>
+            <a:lvl3pPr algn="l">
+              <a:defRPr sz="1500" b="0">
+                <a:solidFill>
+                  <a:srgbClr val="333333"/>
+                </a:solidFill>
+                <a:latin typeface="Hiragino Sans GB"/>
+                <a:ea typeface="Hiragino Sans GB"/>
+                <a:cs typeface="Hiragino Sans GB"/>
+              </a:defRPr>
+            </a:lvl3pPr>
+            <a:lvl4pPr algn="l">
+              <a:defRPr sz="1500" b="0">
+                <a:solidFill>
+                  <a:srgbClr val="333333"/>
+                </a:solidFill>
+                <a:latin typeface="Hiragino Sans GB"/>
+                <a:ea typeface="Hiragino Sans GB"/>
+                <a:cs typeface="Hiragino Sans GB"/>
+              </a:defRPr>
+            </a:lvl4pPr>
+            <a:lvl5pPr algn="l">
+              <a:defRPr sz="1500" b="0">
+                <a:solidFill>
+                  <a:srgbClr val="333333"/>
+                </a:solidFill>
+                <a:latin typeface="Hiragino Sans GB"/>
+                <a:ea typeface="Hiragino Sans GB"/>
+                <a:cs typeface="Hiragino Sans GB"/>
+              </a:defRPr>
+            </a:lvl5pPr>
+            <a:lvl6pPr algn="l">
+              <a:defRPr sz="1500" b="0">
+                <a:solidFill>
+                  <a:srgbClr val="333333"/>
+                </a:solidFill>
+                <a:latin typeface="Hiragino Sans GB"/>
+                <a:ea typeface="Hiragino Sans GB"/>
+                <a:cs typeface="Hiragino Sans GB"/>
+              </a:defRPr>
+            </a:lvl6pPr>
+            <a:lvl7pPr algn="l">
+              <a:defRPr sz="1500" b="0">
+                <a:solidFill>
+                  <a:srgbClr val="333333"/>
+                </a:solidFill>
+                <a:latin typeface="Hiragino Sans GB"/>
+                <a:ea typeface="Hiragino Sans GB"/>
+                <a:cs typeface="Hiragino Sans GB"/>
+              </a:defRPr>
+            </a:lvl7pPr>
+            <a:lvl8pPr algn="l">
+              <a:defRPr sz="1500" b="0">
+                <a:solidFill>
+                  <a:srgbClr val="333333"/>
+                </a:solidFill>
+                <a:latin typeface="Hiragino Sans GB"/>
+                <a:ea typeface="Hiragino Sans GB"/>
+                <a:cs typeface="Hiragino Sans GB"/>
+              </a:defRPr>
+            </a:lvl8pPr>
+            <a:lvl9pPr algn="l">
+              <a:defRPr sz="1500" b="0">
+                <a:solidFill>
+                  <a:srgbClr val="333333"/>
+                </a:solidFill>
+                <a:latin typeface="Hiragino Sans GB"/>
+                <a:ea typeface="Hiragino Sans GB"/>
+                <a:cs typeface="Hiragino Sans GB"/>
+              </a:defRPr>
+            </a:lvl9pPr>
+          </a:lstStyle>
           <a:p>
             <a:pPr algn="l">
-              <a:defRPr sz="1600">
-                <a:solidFill>
-                  <a:srgbClr val="333333"/>
-                </a:solidFill>
-                <a:latin typeface="冬青黑体简体中文 W3"/>
-                <a:ea typeface="冬青黑体简体中文 W3"/>
-                <a:cs typeface="冬青黑体简体中文 W3"/>
-                <a:sym typeface="冬青黑体简体中文 W3"/>
+              <a:defRPr sz="1500" b="0">
+                <a:solidFill>
+                  <a:srgbClr val="333333"/>
+                </a:solidFill>
+                <a:latin typeface="Hiragino Sans GB"/>
+                <a:ea typeface="Hiragino Sans GB"/>
+                <a:cs typeface="Hiragino Sans GB"/>
               </a:defRPr>
             </a:pPr>
             <a:r>
-              <a:t>新增能力集中在一个小型模块中，通过接口接入现有显</a:t>
+              <a:rPr sz="1500" b="0">
+                <a:solidFill>
+                  <a:srgbClr val="333333"/>
+                </a:solidFill>
+                <a:latin typeface="Hiragino Sans GB"/>
+                <a:ea typeface="Hiragino Sans GB"/>
+                <a:cs typeface="Hiragino Sans GB"/>
+              </a:rPr>
+              <a:t>将持续的跨节点 token 交换转为专家驻留与少量</a:t>
             </a:r>
           </a:p>
           <a:p>
             <a:pPr algn="l">
-              <a:defRPr sz="1600">
-                <a:solidFill>
-                  <a:srgbClr val="333333"/>
-                </a:solidFill>
-                <a:latin typeface="冬青黑体简体中文 W3"/>
-                <a:ea typeface="冬青黑体简体中文 W3"/>
-                <a:cs typeface="冬青黑体简体中文 W3"/>
-                <a:sym typeface="冬青黑体简体中文 W3"/>
+              <a:defRPr sz="1500" b="0">
+                <a:solidFill>
+                  <a:srgbClr val="333333"/>
+                </a:solidFill>
+                <a:latin typeface="Hiragino Sans GB"/>
+                <a:ea typeface="Hiragino Sans GB"/>
+                <a:cs typeface="Hiragino Sans GB"/>
               </a:defRPr>
             </a:pPr>
             <a:r>
-              <a:t>存、计算阵列及传输引擎。这样的集成方式使</a:t>
-            </a:r>
-            <a:r>
-              <a:rPr>
+              <a:rPr sz="1500" b="0">
+                <a:solidFill>
+                  <a:srgbClr val="333333"/>
+                </a:solidFill>
+                <a:latin typeface="Hiragino Sans GB"/>
+                <a:ea typeface="Hiragino Sans GB"/>
+                <a:cs typeface="Hiragino Sans GB"/>
+              </a:rPr>
+              <a:t>补载，降低业务增长带来的网络传输需求，使现有</a:t>
+            </a:r>
+          </a:p>
+          <a:p>
+            <a:pPr algn="l">
+              <a:defRPr sz="1500" b="0">
+                <a:solidFill>
+                  <a:srgbClr val="333333"/>
+                </a:solidFill>
+                <a:latin typeface="Hiragino Sans GB"/>
+                <a:ea typeface="Hiragino Sans GB"/>
+                <a:cs typeface="Hiragino Sans GB"/>
+              </a:defRPr>
+            </a:pPr>
+            <a:r>
+              <a:rPr sz="1500" b="0">
+                <a:solidFill>
+                  <a:srgbClr val="333333"/>
+                </a:solidFill>
+                <a:latin typeface="Hiragino Sans GB"/>
+                <a:ea typeface="Hiragino Sans GB"/>
+                <a:cs typeface="Hiragino Sans GB"/>
+              </a:rPr>
+              <a:t>网络有机会支撑更高负载，</a:t>
+            </a:r>
+            <a:r>
+              <a:rPr sz="1500" b="1">
                 <a:solidFill>
                   <a:srgbClr val="9C2F32"/>
                 </a:solidFill>
-                <a:latin typeface="冬青黑体简体中文 W6"/>
-                <a:ea typeface="冬青黑体简体中文 W6"/>
-                <a:cs typeface="冬青黑体简体中文 W6"/>
-                <a:sym typeface="冬青黑体简体中文 W6"/>
+                <a:latin typeface="Hiragino Sans GB"/>
+                <a:ea typeface="Hiragino Sans GB"/>
+                <a:cs typeface="Hiragino Sans GB"/>
               </a:rPr>
-              <a:t>设计边界</a:t>
+              <a:t>延后</a:t>
+            </a:r>
+            <a:r>
+              <a:rPr sz="1500" b="0">
+                <a:solidFill>
+                  <a:srgbClr val="333333"/>
+                </a:solidFill>
+                <a:latin typeface="Hiragino Sans GB"/>
+                <a:ea typeface="Hiragino Sans GB"/>
+                <a:cs typeface="Hiragino Sans GB"/>
+              </a:rPr>
+              <a:t>高速网卡、交换机</a:t>
             </a:r>
           </a:p>
           <a:p>
             <a:pPr algn="l">
-              <a:defRPr sz="1600">
-                <a:solidFill>
-                  <a:srgbClr val="9C2F32"/>
-                </a:solidFill>
-                <a:latin typeface="冬青黑体简体中文 W6"/>
-                <a:ea typeface="冬青黑体简体中文 W6"/>
-                <a:cs typeface="冬青黑体简体中文 W6"/>
-                <a:sym typeface="冬青黑体简体中文 W6"/>
+              <a:defRPr sz="1500" b="0">
+                <a:solidFill>
+                  <a:srgbClr val="333333"/>
+                </a:solidFill>
+                <a:latin typeface="Hiragino Sans GB"/>
+                <a:ea typeface="Hiragino Sans GB"/>
+                <a:cs typeface="Hiragino Sans GB"/>
               </a:defRPr>
             </a:pPr>
             <a:r>
-              <a:t>清晰</a:t>
-            </a:r>
-            <a:r>
-              <a:rPr>
-                <a:solidFill>
-                  <a:srgbClr val="333333"/>
-                </a:solidFill>
-                <a:latin typeface="冬青黑体简体中文 W3"/>
-                <a:ea typeface="冬青黑体简体中文 W3"/>
-                <a:cs typeface="冬青黑体简体中文 W3"/>
-                <a:sym typeface="冬青黑体简体中文 W3"/>
+              <a:rPr sz="1500" b="0">
+                <a:solidFill>
+                  <a:srgbClr val="333333"/>
+                </a:solidFill>
+                <a:latin typeface="Hiragino Sans GB"/>
+                <a:ea typeface="Hiragino Sans GB"/>
+                <a:cs typeface="Hiragino Sans GB"/>
               </a:rPr>
-              <a:t>，便于按单个芯片功能开展实现与验证。</a:t>
+              <a:t>及互联链路的扩容投入。</a:t>
             </a:r>
           </a:p>
         </p:txBody>
@@ -4816,25 +5327,131 @@
         </p:spPr>
         <p:txBody>
           <a:bodyPr lIns="0" tIns="0" rIns="0" bIns="0">
-            <a:spAutoFit/>
+            <a:noAutofit/>
           </a:bodyPr>
           <a:lstStyle>
+            <a:defPPr algn="l">
+              <a:defRPr sz="1800" b="1">
+                <a:solidFill>
+                  <a:srgbClr val="333333"/>
+                </a:solidFill>
+                <a:latin typeface="Hiragino Sans GB"/>
+                <a:ea typeface="Hiragino Sans GB"/>
+                <a:cs typeface="Hiragino Sans GB"/>
+              </a:defRPr>
+            </a:defPPr>
             <a:lvl1pPr algn="l">
-              <a:defRPr>
-                <a:solidFill>
-                  <a:srgbClr val="333333"/>
-                </a:solidFill>
-                <a:latin typeface="冬青黑体简体中文 W6"/>
-                <a:ea typeface="冬青黑体简体中文 W6"/>
-                <a:cs typeface="冬青黑体简体中文 W6"/>
-                <a:sym typeface="冬青黑体简体中文 W6"/>
+              <a:defRPr sz="1800" b="1">
+                <a:solidFill>
+                  <a:srgbClr val="333333"/>
+                </a:solidFill>
+                <a:latin typeface="Hiragino Sans GB"/>
+                <a:ea typeface="Hiragino Sans GB"/>
+                <a:cs typeface="Hiragino Sans GB"/>
               </a:defRPr>
             </a:lvl1pPr>
+            <a:lvl2pPr algn="l">
+              <a:defRPr sz="1800" b="1">
+                <a:solidFill>
+                  <a:srgbClr val="333333"/>
+                </a:solidFill>
+                <a:latin typeface="Hiragino Sans GB"/>
+                <a:ea typeface="Hiragino Sans GB"/>
+                <a:cs typeface="Hiragino Sans GB"/>
+              </a:defRPr>
+            </a:lvl2pPr>
+            <a:lvl3pPr algn="l">
+              <a:defRPr sz="1800" b="1">
+                <a:solidFill>
+                  <a:srgbClr val="333333"/>
+                </a:solidFill>
+                <a:latin typeface="Hiragino Sans GB"/>
+                <a:ea typeface="Hiragino Sans GB"/>
+                <a:cs typeface="Hiragino Sans GB"/>
+              </a:defRPr>
+            </a:lvl3pPr>
+            <a:lvl4pPr algn="l">
+              <a:defRPr sz="1800" b="1">
+                <a:solidFill>
+                  <a:srgbClr val="333333"/>
+                </a:solidFill>
+                <a:latin typeface="Hiragino Sans GB"/>
+                <a:ea typeface="Hiragino Sans GB"/>
+                <a:cs typeface="Hiragino Sans GB"/>
+              </a:defRPr>
+            </a:lvl4pPr>
+            <a:lvl5pPr algn="l">
+              <a:defRPr sz="1800" b="1">
+                <a:solidFill>
+                  <a:srgbClr val="333333"/>
+                </a:solidFill>
+                <a:latin typeface="Hiragino Sans GB"/>
+                <a:ea typeface="Hiragino Sans GB"/>
+                <a:cs typeface="Hiragino Sans GB"/>
+              </a:defRPr>
+            </a:lvl5pPr>
+            <a:lvl6pPr algn="l">
+              <a:defRPr sz="1800" b="1">
+                <a:solidFill>
+                  <a:srgbClr val="333333"/>
+                </a:solidFill>
+                <a:latin typeface="Hiragino Sans GB"/>
+                <a:ea typeface="Hiragino Sans GB"/>
+                <a:cs typeface="Hiragino Sans GB"/>
+              </a:defRPr>
+            </a:lvl6pPr>
+            <a:lvl7pPr algn="l">
+              <a:defRPr sz="1800" b="1">
+                <a:solidFill>
+                  <a:srgbClr val="333333"/>
+                </a:solidFill>
+                <a:latin typeface="Hiragino Sans GB"/>
+                <a:ea typeface="Hiragino Sans GB"/>
+                <a:cs typeface="Hiragino Sans GB"/>
+              </a:defRPr>
+            </a:lvl7pPr>
+            <a:lvl8pPr algn="l">
+              <a:defRPr sz="1800" b="1">
+                <a:solidFill>
+                  <a:srgbClr val="333333"/>
+                </a:solidFill>
+                <a:latin typeface="Hiragino Sans GB"/>
+                <a:ea typeface="Hiragino Sans GB"/>
+                <a:cs typeface="Hiragino Sans GB"/>
+              </a:defRPr>
+            </a:lvl8pPr>
+            <a:lvl9pPr algn="l">
+              <a:defRPr sz="1800" b="1">
+                <a:solidFill>
+                  <a:srgbClr val="333333"/>
+                </a:solidFill>
+                <a:latin typeface="Hiragino Sans GB"/>
+                <a:ea typeface="Hiragino Sans GB"/>
+                <a:cs typeface="Hiragino Sans GB"/>
+              </a:defRPr>
+            </a:lvl9pPr>
           </a:lstStyle>
           <a:p>
-            <a:pPr algn="l"/>
-            <a:r>
-              <a:t>资源代价可估算</a:t>
+            <a:pPr algn="l">
+              <a:defRPr sz="1800" b="1">
+                <a:solidFill>
+                  <a:srgbClr val="333333"/>
+                </a:solidFill>
+                <a:latin typeface="Hiragino Sans GB"/>
+                <a:ea typeface="Hiragino Sans GB"/>
+                <a:cs typeface="Hiragino Sans GB"/>
+              </a:defRPr>
+            </a:pPr>
+            <a:r>
+              <a:rPr sz="1800" b="1">
+                <a:solidFill>
+                  <a:srgbClr val="333333"/>
+                </a:solidFill>
+                <a:latin typeface="Hiragino Sans GB"/>
+                <a:ea typeface="Hiragino Sans GB"/>
+                <a:cs typeface="Hiragino Sans GB"/>
+              </a:rPr>
+              <a:t>形成加速器产品差异化</a:t>
             </a:r>
           </a:p>
         </p:txBody>
@@ -4848,7 +5465,7 @@
         <p:spPr>
           <a:xfrm>
             <a:off x="6400800" y="5019675"/>
-            <a:ext cx="5238750" cy="812800"/>
+            <a:ext cx="5238750" cy="914400"/>
           </a:xfrm>
           <a:prstGeom prst="rect">
             <a:avLst/>
@@ -4864,70 +5481,211 @@
         </p:spPr>
         <p:txBody>
           <a:bodyPr lIns="0" tIns="0" rIns="0" bIns="0">
-            <a:spAutoFit/>
+            <a:noAutofit/>
           </a:bodyPr>
-          <a:lstStyle/>
+          <a:lstStyle>
+            <a:defPPr algn="l">
+              <a:defRPr sz="1500" b="0">
+                <a:solidFill>
+                  <a:srgbClr val="333333"/>
+                </a:solidFill>
+                <a:latin typeface="Hiragino Sans GB"/>
+                <a:ea typeface="Hiragino Sans GB"/>
+                <a:cs typeface="Hiragino Sans GB"/>
+              </a:defRPr>
+            </a:defPPr>
+            <a:lvl1pPr algn="l">
+              <a:defRPr sz="1500" b="0">
+                <a:solidFill>
+                  <a:srgbClr val="333333"/>
+                </a:solidFill>
+                <a:latin typeface="Hiragino Sans GB"/>
+                <a:ea typeface="Hiragino Sans GB"/>
+                <a:cs typeface="Hiragino Sans GB"/>
+              </a:defRPr>
+            </a:lvl1pPr>
+            <a:lvl2pPr algn="l">
+              <a:defRPr sz="1500" b="0">
+                <a:solidFill>
+                  <a:srgbClr val="333333"/>
+                </a:solidFill>
+                <a:latin typeface="Hiragino Sans GB"/>
+                <a:ea typeface="Hiragino Sans GB"/>
+                <a:cs typeface="Hiragino Sans GB"/>
+              </a:defRPr>
+            </a:lvl2pPr>
+            <a:lvl3pPr algn="l">
+              <a:defRPr sz="1500" b="0">
+                <a:solidFill>
+                  <a:srgbClr val="333333"/>
+                </a:solidFill>
+                <a:latin typeface="Hiragino Sans GB"/>
+                <a:ea typeface="Hiragino Sans GB"/>
+                <a:cs typeface="Hiragino Sans GB"/>
+              </a:defRPr>
+            </a:lvl3pPr>
+            <a:lvl4pPr algn="l">
+              <a:defRPr sz="1500" b="0">
+                <a:solidFill>
+                  <a:srgbClr val="333333"/>
+                </a:solidFill>
+                <a:latin typeface="Hiragino Sans GB"/>
+                <a:ea typeface="Hiragino Sans GB"/>
+                <a:cs typeface="Hiragino Sans GB"/>
+              </a:defRPr>
+            </a:lvl4pPr>
+            <a:lvl5pPr algn="l">
+              <a:defRPr sz="1500" b="0">
+                <a:solidFill>
+                  <a:srgbClr val="333333"/>
+                </a:solidFill>
+                <a:latin typeface="Hiragino Sans GB"/>
+                <a:ea typeface="Hiragino Sans GB"/>
+                <a:cs typeface="Hiragino Sans GB"/>
+              </a:defRPr>
+            </a:lvl5pPr>
+            <a:lvl6pPr algn="l">
+              <a:defRPr sz="1500" b="0">
+                <a:solidFill>
+                  <a:srgbClr val="333333"/>
+                </a:solidFill>
+                <a:latin typeface="Hiragino Sans GB"/>
+                <a:ea typeface="Hiragino Sans GB"/>
+                <a:cs typeface="Hiragino Sans GB"/>
+              </a:defRPr>
+            </a:lvl6pPr>
+            <a:lvl7pPr algn="l">
+              <a:defRPr sz="1500" b="0">
+                <a:solidFill>
+                  <a:srgbClr val="333333"/>
+                </a:solidFill>
+                <a:latin typeface="Hiragino Sans GB"/>
+                <a:ea typeface="Hiragino Sans GB"/>
+                <a:cs typeface="Hiragino Sans GB"/>
+              </a:defRPr>
+            </a:lvl7pPr>
+            <a:lvl8pPr algn="l">
+              <a:defRPr sz="1500" b="0">
+                <a:solidFill>
+                  <a:srgbClr val="333333"/>
+                </a:solidFill>
+                <a:latin typeface="Hiragino Sans GB"/>
+                <a:ea typeface="Hiragino Sans GB"/>
+                <a:cs typeface="Hiragino Sans GB"/>
+              </a:defRPr>
+            </a:lvl8pPr>
+            <a:lvl9pPr algn="l">
+              <a:defRPr sz="1500" b="0">
+                <a:solidFill>
+                  <a:srgbClr val="333333"/>
+                </a:solidFill>
+                <a:latin typeface="Hiragino Sans GB"/>
+                <a:ea typeface="Hiragino Sans GB"/>
+                <a:cs typeface="Hiragino Sans GB"/>
+              </a:defRPr>
+            </a:lvl9pPr>
+          </a:lstStyle>
           <a:p>
             <a:pPr algn="l">
-              <a:defRPr sz="1600">
-                <a:solidFill>
-                  <a:srgbClr val="333333"/>
-                </a:solidFill>
-                <a:latin typeface="冬青黑体简体中文 W3"/>
-                <a:ea typeface="冬青黑体简体中文 W3"/>
-                <a:cs typeface="冬青黑体简体中文 W3"/>
-                <a:sym typeface="冬青黑体简体中文 W3"/>
+              <a:defRPr sz="1500" b="0">
+                <a:solidFill>
+                  <a:srgbClr val="333333"/>
+                </a:solidFill>
+                <a:latin typeface="Hiragino Sans GB"/>
+                <a:ea typeface="Hiragino Sans GB"/>
+                <a:cs typeface="Hiragino Sans GB"/>
               </a:defRPr>
             </a:pPr>
             <a:r>
-              <a:t>参考配置给出约 8 MiB 片上存储/卡，以及两层约 0.9</a:t>
+              <a:rPr sz="1500" b="0">
+                <a:solidFill>
+                  <a:srgbClr val="333333"/>
+                </a:solidFill>
+                <a:latin typeface="Hiragino Sans GB"/>
+                <a:ea typeface="Hiragino Sans GB"/>
+                <a:cs typeface="Hiragino Sans GB"/>
+              </a:rPr>
+              <a:t>将需求检查与自主补载集成为面向大规模 MoE</a:t>
             </a:r>
           </a:p>
           <a:p>
             <a:pPr algn="l">
-              <a:defRPr sz="1600">
-                <a:solidFill>
-                  <a:srgbClr val="333333"/>
-                </a:solidFill>
-                <a:latin typeface="冬青黑体简体中文 W3"/>
-                <a:ea typeface="冬青黑体简体中文 W3"/>
-                <a:cs typeface="冬青黑体简体中文 W3"/>
-                <a:sym typeface="冬青黑体简体中文 W3"/>
+              <a:defRPr sz="1500" b="0">
+                <a:solidFill>
+                  <a:srgbClr val="333333"/>
+                </a:solidFill>
+                <a:latin typeface="Hiragino Sans GB"/>
+                <a:ea typeface="Hiragino Sans GB"/>
+                <a:cs typeface="Hiragino Sans GB"/>
               </a:defRPr>
             </a:pPr>
             <a:r>
-              <a:t>85 GiB/节点的额外专家副本预算，为评估新增资源与</a:t>
+              <a:rPr sz="1500" b="0">
+                <a:solidFill>
+                  <a:srgbClr val="333333"/>
+                </a:solidFill>
+                <a:latin typeface="Hiragino Sans GB"/>
+                <a:ea typeface="Hiragino Sans GB"/>
+                <a:cs typeface="Hiragino Sans GB"/>
+              </a:rPr>
+              <a:t>服务的芯片功能，以实际服务吞吐和部署成本体现</a:t>
             </a:r>
           </a:p>
           <a:p>
             <a:pPr algn="l">
-              <a:defRPr sz="1600">
-                <a:solidFill>
-                  <a:srgbClr val="333333"/>
-                </a:solidFill>
-                <a:latin typeface="冬青黑体简体中文 W3"/>
-                <a:ea typeface="冬青黑体简体中文 W3"/>
-                <a:cs typeface="冬青黑体简体中文 W3"/>
-                <a:sym typeface="冬青黑体简体中文 W3"/>
+              <a:defRPr sz="1500" b="0">
+                <a:solidFill>
+                  <a:srgbClr val="333333"/>
+                </a:solidFill>
+                <a:latin typeface="Hiragino Sans GB"/>
+                <a:ea typeface="Hiragino Sans GB"/>
+                <a:cs typeface="Hiragino Sans GB"/>
               </a:defRPr>
             </a:pPr>
             <a:r>
-              <a:t>服务收益的关系提供</a:t>
-            </a:r>
-            <a:r>
-              <a:rPr>
+              <a:rPr sz="1500" b="1">
                 <a:solidFill>
                   <a:srgbClr val="9C2F32"/>
                 </a:solidFill>
-                <a:latin typeface="冬青黑体简体中文 W6"/>
-                <a:ea typeface="冬青黑体简体中文 W6"/>
-                <a:cs typeface="冬青黑体简体中文 W6"/>
-                <a:sym typeface="冬青黑体简体中文 W6"/>
+                <a:latin typeface="Hiragino Sans GB"/>
+                <a:ea typeface="Hiragino Sans GB"/>
+                <a:cs typeface="Hiragino Sans GB"/>
               </a:rPr>
-              <a:t>可量化的实施依据</a:t>
-            </a:r>
-            <a:r>
-              <a:t>。</a:t>
+              <a:t>产品竞争力</a:t>
+            </a:r>
+            <a:r>
+              <a:rPr sz="1500" b="0">
+                <a:solidFill>
+                  <a:srgbClr val="333333"/>
+                </a:solidFill>
+                <a:latin typeface="Hiragino Sans GB"/>
+                <a:ea typeface="Hiragino Sans GB"/>
+                <a:cs typeface="Hiragino Sans GB"/>
+              </a:rPr>
+              <a:t>，为客户选型提供依据，并为芯片销售</a:t>
+            </a:r>
+          </a:p>
+          <a:p>
+            <a:pPr algn="l">
+              <a:defRPr sz="1500" b="0">
+                <a:solidFill>
+                  <a:srgbClr val="333333"/>
+                </a:solidFill>
+                <a:latin typeface="Hiragino Sans GB"/>
+                <a:ea typeface="Hiragino Sans GB"/>
+                <a:cs typeface="Hiragino Sans GB"/>
+              </a:defRPr>
+            </a:pPr>
+            <a:r>
+              <a:rPr sz="1500" b="0">
+                <a:solidFill>
+                  <a:srgbClr val="333333"/>
+                </a:solidFill>
+                <a:latin typeface="Hiragino Sans GB"/>
+                <a:ea typeface="Hiragino Sans GB"/>
+                <a:cs typeface="Hiragino Sans GB"/>
+              </a:rPr>
+              <a:t>及专利授权提供价值支撑。</a:t>
             </a:r>
           </a:p>
         </p:txBody>
@@ -16249,47 +17007,157 @@
       </p:grpSp>
       <p:sp>
         <p:nvSpPr>
-          <p:cNvPr id="179" name="第一步：Prefill 后组织请求，建立本地初始匹配"/>
-          <p:cNvSpPr txBox="1"/>
+          <p:cNvPr id="179" name="179">
+            <a:extLst>
+              <a:ext uri="{FF2B5EF4-FFF2-40B4-BE49-F238E27FC236}">
+                <a16:creationId xmlns:a16="http://schemas.microsoft.com/office/drawing/2014/main" id="{DBFF63B6-8C5A-4700-BDEE-D18EFE679240}"/>
+              </a:ext>
+            </a:extLst>
+          </p:cNvPr>
+          <p:cNvSpPr>
+            <a:spLocks noGrp="1"/>
+          </p:cNvSpPr>
           <p:nvPr/>
         </p:nvSpPr>
         <p:spPr>
           <a:xfrm>
-            <a:off x="552450" y="2952750"/>
-            <a:ext cx="11087100" cy="273050"/>
+            <a:off x="552450" y="2667000"/>
+            <a:ext cx="11087100" cy="304800"/>
           </a:xfrm>
           <a:prstGeom prst="rect">
             <a:avLst/>
           </a:prstGeom>
-          <a:ln w="12700">
-            <a:miter lim="400000"/>
+          <a:noFill/>
+          <a:ln w="0">
+            <a:noFill/>
           </a:ln>
-          <a:extLst>
-            <a:ext uri="{C572A759-6A51-4108-AA02-DFA0A04FC94B}">
-              <ma14:wrappingTextBoxFlag xmlns:ma14="http://schemas.microsoft.com/office/mac/drawingml/2011/main" val="1"/>
-            </a:ext>
-          </a:extLst>
         </p:spPr>
         <p:txBody>
           <a:bodyPr lIns="0" tIns="0" rIns="0" bIns="0">
-            <a:spAutoFit/>
+            <a:noAutofit/>
           </a:bodyPr>
           <a:lstStyle>
+            <a:defPPr algn="l">
+              <a:defRPr sz="1875" b="1">
+                <a:solidFill>
+                  <a:srgbClr val="333333"/>
+                </a:solidFill>
+                <a:latin typeface="Hiragino Sans GB"/>
+                <a:ea typeface="Hiragino Sans GB"/>
+                <a:cs typeface="Hiragino Sans GB"/>
+              </a:defRPr>
+            </a:defPPr>
             <a:lvl1pPr algn="l">
-              <a:defRPr sz="2100">
-                <a:solidFill>
-                  <a:srgbClr val="111111"/>
-                </a:solidFill>
-                <a:latin typeface="冬青黑体简体中文 W6"/>
-                <a:ea typeface="冬青黑体简体中文 W6"/>
-                <a:cs typeface="冬青黑体简体中文 W6"/>
-                <a:sym typeface="冬青黑体简体中文 W6"/>
+              <a:defRPr sz="1875" b="1">
+                <a:solidFill>
+                  <a:srgbClr val="333333"/>
+                </a:solidFill>
+                <a:latin typeface="Hiragino Sans GB"/>
+                <a:ea typeface="Hiragino Sans GB"/>
+                <a:cs typeface="Hiragino Sans GB"/>
               </a:defRPr>
             </a:lvl1pPr>
+            <a:lvl2pPr algn="l">
+              <a:defRPr sz="1875" b="1">
+                <a:solidFill>
+                  <a:srgbClr val="333333"/>
+                </a:solidFill>
+                <a:latin typeface="Hiragino Sans GB"/>
+                <a:ea typeface="Hiragino Sans GB"/>
+                <a:cs typeface="Hiragino Sans GB"/>
+              </a:defRPr>
+            </a:lvl2pPr>
+            <a:lvl3pPr algn="l">
+              <a:defRPr sz="1875" b="1">
+                <a:solidFill>
+                  <a:srgbClr val="333333"/>
+                </a:solidFill>
+                <a:latin typeface="Hiragino Sans GB"/>
+                <a:ea typeface="Hiragino Sans GB"/>
+                <a:cs typeface="Hiragino Sans GB"/>
+              </a:defRPr>
+            </a:lvl3pPr>
+            <a:lvl4pPr algn="l">
+              <a:defRPr sz="1875" b="1">
+                <a:solidFill>
+                  <a:srgbClr val="333333"/>
+                </a:solidFill>
+                <a:latin typeface="Hiragino Sans GB"/>
+                <a:ea typeface="Hiragino Sans GB"/>
+                <a:cs typeface="Hiragino Sans GB"/>
+              </a:defRPr>
+            </a:lvl4pPr>
+            <a:lvl5pPr algn="l">
+              <a:defRPr sz="1875" b="1">
+                <a:solidFill>
+                  <a:srgbClr val="333333"/>
+                </a:solidFill>
+                <a:latin typeface="Hiragino Sans GB"/>
+                <a:ea typeface="Hiragino Sans GB"/>
+                <a:cs typeface="Hiragino Sans GB"/>
+              </a:defRPr>
+            </a:lvl5pPr>
+            <a:lvl6pPr algn="l">
+              <a:defRPr sz="1875" b="1">
+                <a:solidFill>
+                  <a:srgbClr val="333333"/>
+                </a:solidFill>
+                <a:latin typeface="Hiragino Sans GB"/>
+                <a:ea typeface="Hiragino Sans GB"/>
+                <a:cs typeface="Hiragino Sans GB"/>
+              </a:defRPr>
+            </a:lvl6pPr>
+            <a:lvl7pPr algn="l">
+              <a:defRPr sz="1875" b="1">
+                <a:solidFill>
+                  <a:srgbClr val="333333"/>
+                </a:solidFill>
+                <a:latin typeface="Hiragino Sans GB"/>
+                <a:ea typeface="Hiragino Sans GB"/>
+                <a:cs typeface="Hiragino Sans GB"/>
+              </a:defRPr>
+            </a:lvl7pPr>
+            <a:lvl8pPr algn="l">
+              <a:defRPr sz="1875" b="1">
+                <a:solidFill>
+                  <a:srgbClr val="333333"/>
+                </a:solidFill>
+                <a:latin typeface="Hiragino Sans GB"/>
+                <a:ea typeface="Hiragino Sans GB"/>
+                <a:cs typeface="Hiragino Sans GB"/>
+              </a:defRPr>
+            </a:lvl8pPr>
+            <a:lvl9pPr algn="l">
+              <a:defRPr sz="1875" b="1">
+                <a:solidFill>
+                  <a:srgbClr val="333333"/>
+                </a:solidFill>
+                <a:latin typeface="Hiragino Sans GB"/>
+                <a:ea typeface="Hiragino Sans GB"/>
+                <a:cs typeface="Hiragino Sans GB"/>
+              </a:defRPr>
+            </a:lvl9pPr>
           </a:lstStyle>
           <a:p>
-            <a:pPr algn="l"/>
-            <a:r>
+            <a:pPr algn="l">
+              <a:defRPr sz="1875" b="1">
+                <a:solidFill>
+                  <a:srgbClr val="333333"/>
+                </a:solidFill>
+                <a:latin typeface="Hiragino Sans GB"/>
+                <a:ea typeface="Hiragino Sans GB"/>
+                <a:cs typeface="Hiragino Sans GB"/>
+              </a:defRPr>
+            </a:pPr>
+            <a:r>
+              <a:rPr sz="1875" b="1">
+                <a:solidFill>
+                  <a:srgbClr val="333333"/>
+                </a:solidFill>
+                <a:latin typeface="Hiragino Sans GB"/>
+                <a:ea typeface="Hiragino Sans GB"/>
+                <a:cs typeface="Hiragino Sans GB"/>
+              </a:rPr>
               <a:t>第一步：Prefill 后组织请求，建立本地初始匹配</a:t>
             </a:r>
           </a:p>
@@ -16297,125 +17165,413 @@
       </p:sp>
       <p:sp>
         <p:nvSpPr>
-          <p:cNvPr id="180" name="Prefill 结束时，提取各请求在本层的专家需求摘要，将需求相近的请求及其 KV 状态交接到节点 A。假…"/>
-          <p:cNvSpPr txBox="1"/>
+          <p:cNvPr id="180" name="180">
+            <a:extLst>
+              <a:ext uri="{FF2B5EF4-FFF2-40B4-BE49-F238E27FC236}">
+                <a16:creationId xmlns:a16="http://schemas.microsoft.com/office/drawing/2014/main" id="{510A9400-A69F-4077-A98C-A25C157AADA2}"/>
+              </a:ext>
+            </a:extLst>
+          </p:cNvPr>
+          <p:cNvSpPr>
+            <a:spLocks noGrp="1"/>
+          </p:cNvSpPr>
           <p:nvPr/>
         </p:nvSpPr>
         <p:spPr>
           <a:xfrm>
-            <a:off x="552450" y="3581400"/>
-            <a:ext cx="11087100" cy="1600200"/>
+            <a:off x="552450" y="3095625"/>
+            <a:ext cx="11087100" cy="1143000"/>
           </a:xfrm>
           <a:prstGeom prst="rect">
             <a:avLst/>
           </a:prstGeom>
-          <a:ln w="12700">
-            <a:miter lim="400000"/>
+          <a:noFill/>
+          <a:ln w="0">
+            <a:noFill/>
           </a:ln>
-          <a:extLst>
-            <a:ext uri="{C572A759-6A51-4108-AA02-DFA0A04FC94B}">
-              <ma14:wrappingTextBoxFlag xmlns:ma14="http://schemas.microsoft.com/office/mac/drawingml/2011/main" val="1"/>
-            </a:ext>
-          </a:extLst>
         </p:spPr>
         <p:txBody>
           <a:bodyPr lIns="0" tIns="0" rIns="0" bIns="0">
-            <a:spAutoFit/>
+            <a:noAutofit/>
           </a:bodyPr>
-          <a:lstStyle/>
+          <a:lstStyle>
+            <a:defPPr algn="l">
+              <a:defRPr sz="1500" b="0">
+                <a:solidFill>
+                  <a:srgbClr val="333333"/>
+                </a:solidFill>
+                <a:latin typeface="Hiragino Sans GB"/>
+                <a:ea typeface="Hiragino Sans GB"/>
+                <a:cs typeface="Hiragino Sans GB"/>
+              </a:defRPr>
+            </a:defPPr>
+            <a:lvl1pPr algn="l">
+              <a:defRPr sz="1500" b="0">
+                <a:solidFill>
+                  <a:srgbClr val="333333"/>
+                </a:solidFill>
+                <a:latin typeface="Hiragino Sans GB"/>
+                <a:ea typeface="Hiragino Sans GB"/>
+                <a:cs typeface="Hiragino Sans GB"/>
+              </a:defRPr>
+            </a:lvl1pPr>
+            <a:lvl2pPr algn="l">
+              <a:defRPr sz="1500" b="0">
+                <a:solidFill>
+                  <a:srgbClr val="333333"/>
+                </a:solidFill>
+                <a:latin typeface="Hiragino Sans GB"/>
+                <a:ea typeface="Hiragino Sans GB"/>
+                <a:cs typeface="Hiragino Sans GB"/>
+              </a:defRPr>
+            </a:lvl2pPr>
+            <a:lvl3pPr algn="l">
+              <a:defRPr sz="1500" b="0">
+                <a:solidFill>
+                  <a:srgbClr val="333333"/>
+                </a:solidFill>
+                <a:latin typeface="Hiragino Sans GB"/>
+                <a:ea typeface="Hiragino Sans GB"/>
+                <a:cs typeface="Hiragino Sans GB"/>
+              </a:defRPr>
+            </a:lvl3pPr>
+            <a:lvl4pPr algn="l">
+              <a:defRPr sz="1500" b="0">
+                <a:solidFill>
+                  <a:srgbClr val="333333"/>
+                </a:solidFill>
+                <a:latin typeface="Hiragino Sans GB"/>
+                <a:ea typeface="Hiragino Sans GB"/>
+                <a:cs typeface="Hiragino Sans GB"/>
+              </a:defRPr>
+            </a:lvl4pPr>
+            <a:lvl5pPr algn="l">
+              <a:defRPr sz="1500" b="0">
+                <a:solidFill>
+                  <a:srgbClr val="333333"/>
+                </a:solidFill>
+                <a:latin typeface="Hiragino Sans GB"/>
+                <a:ea typeface="Hiragino Sans GB"/>
+                <a:cs typeface="Hiragino Sans GB"/>
+              </a:defRPr>
+            </a:lvl5pPr>
+            <a:lvl6pPr algn="l">
+              <a:defRPr sz="1500" b="0">
+                <a:solidFill>
+                  <a:srgbClr val="333333"/>
+                </a:solidFill>
+                <a:latin typeface="Hiragino Sans GB"/>
+                <a:ea typeface="Hiragino Sans GB"/>
+                <a:cs typeface="Hiragino Sans GB"/>
+              </a:defRPr>
+            </a:lvl6pPr>
+            <a:lvl7pPr algn="l">
+              <a:defRPr sz="1500" b="0">
+                <a:solidFill>
+                  <a:srgbClr val="333333"/>
+                </a:solidFill>
+                <a:latin typeface="Hiragino Sans GB"/>
+                <a:ea typeface="Hiragino Sans GB"/>
+                <a:cs typeface="Hiragino Sans GB"/>
+              </a:defRPr>
+            </a:lvl7pPr>
+            <a:lvl8pPr algn="l">
+              <a:defRPr sz="1500" b="0">
+                <a:solidFill>
+                  <a:srgbClr val="333333"/>
+                </a:solidFill>
+                <a:latin typeface="Hiragino Sans GB"/>
+                <a:ea typeface="Hiragino Sans GB"/>
+                <a:cs typeface="Hiragino Sans GB"/>
+              </a:defRPr>
+            </a:lvl8pPr>
+            <a:lvl9pPr algn="l">
+              <a:defRPr sz="1500" b="0">
+                <a:solidFill>
+                  <a:srgbClr val="333333"/>
+                </a:solidFill>
+                <a:latin typeface="Hiragino Sans GB"/>
+                <a:ea typeface="Hiragino Sans GB"/>
+                <a:cs typeface="Hiragino Sans GB"/>
+              </a:defRPr>
+            </a:lvl9pPr>
+          </a:lstStyle>
           <a:p>
             <a:pPr algn="l">
-              <a:defRPr>
-                <a:solidFill>
-                  <a:srgbClr val="333333"/>
-                </a:solidFill>
-                <a:latin typeface="冬青黑体简体中文 W3"/>
-                <a:ea typeface="冬青黑体简体中文 W3"/>
-                <a:cs typeface="冬青黑体简体中文 W3"/>
-                <a:sym typeface="冬青黑体简体中文 W3"/>
+              <a:defRPr sz="1500" b="0">
+                <a:solidFill>
+                  <a:srgbClr val="333333"/>
+                </a:solidFill>
+                <a:latin typeface="Hiragino Sans GB"/>
+                <a:ea typeface="Hiragino Sans GB"/>
+                <a:cs typeface="Hiragino Sans GB"/>
               </a:defRPr>
             </a:pPr>
             <a:r>
-              <a:t>Prefill 结束时，提取各请求在本层的专家需求摘要，将需求相近的请求及其 KV 状态交接到节点 A。假</a:t>
+              <a:rPr sz="1500" b="0">
+                <a:solidFill>
+                  <a:srgbClr val="333333"/>
+                </a:solidFill>
+                <a:latin typeface="Hiragino Sans GB"/>
+                <a:ea typeface="Hiragino Sans GB"/>
+                <a:cs typeface="Hiragino Sans GB"/>
+              </a:rPr>
+              <a:t>Prefill 结束时，提取各请求在本层的专家需求摘要，将需求相近的请求及其 KV 状态交接到节点 A。</a:t>
             </a:r>
           </a:p>
           <a:p>
             <a:pPr algn="l">
-              <a:defRPr>
-                <a:solidFill>
-                  <a:srgbClr val="333333"/>
-                </a:solidFill>
-                <a:latin typeface="冬青黑体简体中文 W3"/>
-                <a:ea typeface="冬青黑体简体中文 W3"/>
-                <a:cs typeface="冬青黑体简体中文 W3"/>
-                <a:sym typeface="冬青黑体简体中文 W3"/>
+              <a:defRPr sz="1500" b="0">
+                <a:solidFill>
+                  <a:srgbClr val="333333"/>
+                </a:solidFill>
+                <a:latin typeface="Hiragino Sans GB"/>
+                <a:ea typeface="Hiragino Sans GB"/>
+                <a:cs typeface="Hiragino Sans GB"/>
               </a:defRPr>
             </a:pPr>
             <a:r>
-              <a:t>设这一请求组主要使用专家 1–10，则在节点 A 准备这些专家，并预留 2 个更新槽。专家可分布在节</a:t>
+              <a:rPr sz="1500" b="0">
+                <a:solidFill>
+                  <a:srgbClr val="333333"/>
+                </a:solidFill>
+                <a:latin typeface="Hiragino Sans GB"/>
+                <a:ea typeface="Hiragino Sans GB"/>
+                <a:cs typeface="Hiragino Sans GB"/>
+              </a:rPr>
+              <a:t>假设这一请求组主要使用专家 1–10，则在节点 A 准备这些专家，并预留 2 个更新槽。专家可分布在</a:t>
             </a:r>
           </a:p>
           <a:p>
             <a:pPr algn="l">
-              <a:defRPr>
-                <a:solidFill>
-                  <a:srgbClr val="333333"/>
-                </a:solidFill>
-                <a:latin typeface="冬青黑体简体中文 W3"/>
-                <a:ea typeface="冬青黑体简体中文 W3"/>
-                <a:cs typeface="冬青黑体简体中文 W3"/>
-                <a:sym typeface="冬青黑体简体中文 W3"/>
+              <a:defRPr sz="1500" b="0">
+                <a:solidFill>
+                  <a:srgbClr val="333333"/>
+                </a:solidFill>
+                <a:latin typeface="Hiragino Sans GB"/>
+                <a:ea typeface="Hiragino Sans GB"/>
+                <a:cs typeface="Hiragino Sans GB"/>
               </a:defRPr>
             </a:pPr>
             <a:r>
-              <a:t>点内不同 GPU，由本地驻留目录统一定位。新增模块同时记录请求与层标识、专家需求位图，以及远端</a:t>
+              <a:rPr sz="1500" b="0">
+                <a:solidFill>
+                  <a:srgbClr val="333333"/>
+                </a:solidFill>
+                <a:latin typeface="Hiragino Sans GB"/>
+                <a:ea typeface="Hiragino Sans GB"/>
+                <a:cs typeface="Hiragino Sans GB"/>
+              </a:rPr>
+              <a:t>节点内不同 GPU，由本地驻留目录统一定位。新增模块记录请求与层标识、专家需求位图及远端专家</a:t>
             </a:r>
           </a:p>
           <a:p>
             <a:pPr algn="l">
-              <a:defRPr>
-                <a:solidFill>
-                  <a:srgbClr val="333333"/>
-                </a:solidFill>
-                <a:latin typeface="冬青黑体简体中文 W3"/>
-                <a:ea typeface="冬青黑体简体中文 W3"/>
-                <a:cs typeface="冬青黑体简体中文 W3"/>
-                <a:sym typeface="冬青黑体简体中文 W3"/>
+              <a:defRPr sz="1500" b="0">
+                <a:solidFill>
+                  <a:srgbClr val="333333"/>
+                </a:solidFill>
+                <a:latin typeface="Hiragino Sans GB"/>
+                <a:ea typeface="Hiragino Sans GB"/>
+                <a:cs typeface="Hiragino Sans GB"/>
               </a:defRPr>
             </a:pPr>
             <a:r>
-              <a:t>专家的源地址，</a:t>
-            </a:r>
-            <a:r>
-              <a:rPr>
-                <a:solidFill>
-                  <a:srgbClr val="9C2F32"/>
-                </a:solidFill>
-                <a:latin typeface="冬青黑体简体中文 W6"/>
-                <a:ea typeface="冬青黑体简体中文 W6"/>
-                <a:cs typeface="冬青黑体简体中文 W6"/>
-                <a:sym typeface="冬青黑体简体中文 W6"/>
+              <a:rPr sz="1500" b="0">
+                <a:solidFill>
+                  <a:srgbClr val="333333"/>
+                </a:solidFill>
+                <a:latin typeface="Hiragino Sans GB"/>
+                <a:ea typeface="Hiragino Sans GB"/>
+                <a:cs typeface="Hiragino Sans GB"/>
               </a:rPr>
-              <a:t>完成初始匹配</a:t>
-            </a:r>
-            <a:r>
-              <a:t>。首个 Decode 步按真实路由执行；以下两页继续跟踪组内请求 Q1，假</a:t>
-            </a:r>
-          </a:p>
+              <a:t>的源地址，完成初始匹配。首个 Decode 步按真实路由执行，后续两页跟踪上一轮选中专家 1–8 的 Q1。</a:t>
+            </a:r>
+          </a:p>
+        </p:txBody>
+      </p:sp>
+      <p:pic>
+        <p:nvPicPr>
+          <p:cNvPr id="183" name="">
+            <a:extLst>
+              <a:ext uri="{FF2B5EF4-FFF2-40B4-BE49-F238E27FC236}">
+                <a16:creationId xmlns:a16="http://schemas.microsoft.com/office/drawing/2014/main" id="{BC696F7D-1B43-4BCD-93F7-19C3F6148392}"/>
+              </a:ext>
+            </a:extLst>
+          </p:cNvPr>
+          <p:cNvPicPr>
+            <a:picLocks noChangeAspect="1"/>
+          </p:cNvPicPr>
+          <p:nvPr/>
+        </p:nvPicPr>
+        <p:blipFill>
+          <a:blip r:embed="rIdOracleActivation"/>
+          <a:stretch/>
+        </p:blipFill>
+        <p:spPr>
+          <a:xfrm>
+            <a:off x="556214" y="4495800"/>
+            <a:ext cx="11079571" cy="1447800"/>
+          </a:xfrm>
+          <a:prstGeom prst="rect">
+            <a:avLst/>
+          </a:prstGeom>
+        </p:spPr>
+      </p:pic>
+      <p:sp>
+        <p:nvSpPr>
+          <p:cNvPr id="184" name="activation-caption">
+            <a:extLst>
+              <a:ext uri="{FF2B5EF4-FFF2-40B4-BE49-F238E27FC236}">
+                <a16:creationId xmlns:a16="http://schemas.microsoft.com/office/drawing/2014/main" id="{7DABD7AC-368A-44EA-BA6D-38990FBB0AB6}"/>
+              </a:ext>
+            </a:extLst>
+          </p:cNvPr>
+          <p:cNvSpPr>
+            <a:spLocks noGrp="1"/>
+          </p:cNvSpPr>
+          <p:nvPr/>
+        </p:nvSpPr>
+        <p:spPr>
+          <a:xfrm>
+            <a:off x="552450" y="6115050"/>
+            <a:ext cx="11087100" cy="238125"/>
+          </a:xfrm>
+          <a:prstGeom prst="rect">
+            <a:avLst/>
+          </a:prstGeom>
+          <a:noFill/>
+          <a:ln w="0">
+            <a:noFill/>
+          </a:ln>
+        </p:spPr>
+        <p:txBody>
+          <a:bodyPr lIns="0" tIns="0" rIns="0" bIns="0">
+            <a:noAutofit/>
+          </a:bodyPr>
+          <a:lstStyle>
+            <a:defPPr algn="l">
+              <a:defRPr sz="1350" b="0">
+                <a:solidFill>
+                  <a:srgbClr val="333333"/>
+                </a:solidFill>
+                <a:latin typeface="Hiragino Sans GB"/>
+                <a:ea typeface="Hiragino Sans GB"/>
+                <a:cs typeface="Hiragino Sans GB"/>
+              </a:defRPr>
+            </a:defPPr>
+            <a:lvl1pPr algn="l">
+              <a:defRPr sz="1350" b="0">
+                <a:solidFill>
+                  <a:srgbClr val="333333"/>
+                </a:solidFill>
+                <a:latin typeface="Hiragino Sans GB"/>
+                <a:ea typeface="Hiragino Sans GB"/>
+                <a:cs typeface="Hiragino Sans GB"/>
+              </a:defRPr>
+            </a:lvl1pPr>
+            <a:lvl2pPr algn="l">
+              <a:defRPr sz="1350" b="0">
+                <a:solidFill>
+                  <a:srgbClr val="333333"/>
+                </a:solidFill>
+                <a:latin typeface="Hiragino Sans GB"/>
+                <a:ea typeface="Hiragino Sans GB"/>
+                <a:cs typeface="Hiragino Sans GB"/>
+              </a:defRPr>
+            </a:lvl2pPr>
+            <a:lvl3pPr algn="l">
+              <a:defRPr sz="1350" b="0">
+                <a:solidFill>
+                  <a:srgbClr val="333333"/>
+                </a:solidFill>
+                <a:latin typeface="Hiragino Sans GB"/>
+                <a:ea typeface="Hiragino Sans GB"/>
+                <a:cs typeface="Hiragino Sans GB"/>
+              </a:defRPr>
+            </a:lvl3pPr>
+            <a:lvl4pPr algn="l">
+              <a:defRPr sz="1350" b="0">
+                <a:solidFill>
+                  <a:srgbClr val="333333"/>
+                </a:solidFill>
+                <a:latin typeface="Hiragino Sans GB"/>
+                <a:ea typeface="Hiragino Sans GB"/>
+                <a:cs typeface="Hiragino Sans GB"/>
+              </a:defRPr>
+            </a:lvl4pPr>
+            <a:lvl5pPr algn="l">
+              <a:defRPr sz="1350" b="0">
+                <a:solidFill>
+                  <a:srgbClr val="333333"/>
+                </a:solidFill>
+                <a:latin typeface="Hiragino Sans GB"/>
+                <a:ea typeface="Hiragino Sans GB"/>
+                <a:cs typeface="Hiragino Sans GB"/>
+              </a:defRPr>
+            </a:lvl5pPr>
+            <a:lvl6pPr algn="l">
+              <a:defRPr sz="1350" b="0">
+                <a:solidFill>
+                  <a:srgbClr val="333333"/>
+                </a:solidFill>
+                <a:latin typeface="Hiragino Sans GB"/>
+                <a:ea typeface="Hiragino Sans GB"/>
+                <a:cs typeface="Hiragino Sans GB"/>
+              </a:defRPr>
+            </a:lvl6pPr>
+            <a:lvl7pPr algn="l">
+              <a:defRPr sz="1350" b="0">
+                <a:solidFill>
+                  <a:srgbClr val="333333"/>
+                </a:solidFill>
+                <a:latin typeface="Hiragino Sans GB"/>
+                <a:ea typeface="Hiragino Sans GB"/>
+                <a:cs typeface="Hiragino Sans GB"/>
+              </a:defRPr>
+            </a:lvl7pPr>
+            <a:lvl8pPr algn="l">
+              <a:defRPr sz="1350" b="0">
+                <a:solidFill>
+                  <a:srgbClr val="333333"/>
+                </a:solidFill>
+                <a:latin typeface="Hiragino Sans GB"/>
+                <a:ea typeface="Hiragino Sans GB"/>
+                <a:cs typeface="Hiragino Sans GB"/>
+              </a:defRPr>
+            </a:lvl8pPr>
+            <a:lvl9pPr algn="l">
+              <a:defRPr sz="1350" b="0">
+                <a:solidFill>
+                  <a:srgbClr val="333333"/>
+                </a:solidFill>
+                <a:latin typeface="Hiragino Sans GB"/>
+                <a:ea typeface="Hiragino Sans GB"/>
+                <a:cs typeface="Hiragino Sans GB"/>
+              </a:defRPr>
+            </a:lvl9pPr>
+          </a:lstStyle>
           <a:p>
             <a:pPr algn="l">
-              <a:defRPr>
-                <a:solidFill>
-                  <a:srgbClr val="333333"/>
-                </a:solidFill>
-                <a:latin typeface="冬青黑体简体中文 W3"/>
-                <a:ea typeface="冬青黑体简体中文 W3"/>
-                <a:cs typeface="冬青黑体简体中文 W3"/>
-                <a:sym typeface="冬青黑体简体中文 W3"/>
+              <a:defRPr sz="1350" b="0">
+                <a:solidFill>
+                  <a:srgbClr val="333333"/>
+                </a:solidFill>
+                <a:latin typeface="Hiragino Sans GB"/>
+                <a:ea typeface="Hiragino Sans GB"/>
+                <a:cs typeface="Hiragino Sans GB"/>
               </a:defRPr>
             </a:pPr>
             <a:r>
-              <a:t>设它上一轮选中了专家 1–8。</a:t>
+              <a:rPr sz="1350" b="0">
+                <a:solidFill>
+                  <a:srgbClr val="333333"/>
+                </a:solidFill>
+                <a:latin typeface="Hiragino Sans GB"/>
+                <a:ea typeface="Hiragino Sans GB"/>
+                <a:cs typeface="Hiragino Sans GB"/>
+              </a:rPr>
+              <a:t>既有训练结果：Oracle-MoE（左两图）呈现连续稳定的专家激活，Switch（右两图）更分散。</a:t>
             </a:r>
           </a:p>
         </p:txBody>
